--- a/assets/powerpoints/module-urgence/C4-les-examens-et-les-soins.pptx
+++ b/assets/powerpoints/module-urgence/C4-les-examens-et-les-soins.pptx
@@ -4503,7 +4503,7 @@
             <a:r>
               <a:rPr sz="1300" b="1" i="0" spc="156">
                 <a:solidFill>
-                  <a:srgbClr val="166534"/>
+                  <a:srgbClr val="A5335F"/>
                 </a:solidFill>
                 <a:latin typeface="Verdana"/>
               </a:rPr>
@@ -4843,7 +4843,7 @@
             <a:r>
               <a:rPr sz="1300" b="1" i="0" spc="156">
                 <a:solidFill>
-                  <a:srgbClr val="166534"/>
+                  <a:srgbClr val="A5335F"/>
                 </a:solidFill>
                 <a:latin typeface="Verdana"/>
               </a:rPr>
@@ -4993,7 +4993,7 @@
             </a:avLst>
           </a:prstGeom>
           <a:solidFill>
-            <a:srgbClr val="E3F1E7"/>
+            <a:srgbClr val="FCE9F0"/>
           </a:solidFill>
           <a:ln>
             <a:noFill/>
@@ -5050,7 +5050,7 @@
             <a:r>
               <a:rPr sz="1500" b="1" i="0">
                 <a:solidFill>
-                  <a:srgbClr val="166534"/>
+                  <a:srgbClr val="A5335F"/>
                 </a:solidFill>
                 <a:latin typeface="Verdana"/>
               </a:rPr>
@@ -5170,7 +5170,7 @@
             </a:avLst>
           </a:prstGeom>
           <a:solidFill>
-            <a:srgbClr val="E3F1E7"/>
+            <a:srgbClr val="FCE9F0"/>
           </a:solidFill>
           <a:ln>
             <a:noFill/>
@@ -5227,7 +5227,7 @@
             <a:r>
               <a:rPr sz="1500" b="1" i="0">
                 <a:solidFill>
-                  <a:srgbClr val="166534"/>
+                  <a:srgbClr val="A5335F"/>
                 </a:solidFill>
                 <a:latin typeface="Verdana"/>
               </a:rPr>
@@ -5347,7 +5347,7 @@
             </a:avLst>
           </a:prstGeom>
           <a:solidFill>
-            <a:srgbClr val="E3F1E7"/>
+            <a:srgbClr val="FCE9F0"/>
           </a:solidFill>
           <a:ln>
             <a:noFill/>
@@ -5404,7 +5404,7 @@
             <a:r>
               <a:rPr sz="1500" b="1" i="0">
                 <a:solidFill>
-                  <a:srgbClr val="166534"/>
+                  <a:srgbClr val="A5335F"/>
                 </a:solidFill>
                 <a:latin typeface="Verdana"/>
               </a:rPr>
@@ -5524,7 +5524,7 @@
             </a:avLst>
           </a:prstGeom>
           <a:solidFill>
-            <a:srgbClr val="E3F1E7"/>
+            <a:srgbClr val="FCE9F0"/>
           </a:solidFill>
           <a:ln>
             <a:noFill/>
@@ -5581,7 +5581,7 @@
             <a:r>
               <a:rPr sz="1500" b="1" i="0">
                 <a:solidFill>
-                  <a:srgbClr val="166534"/>
+                  <a:srgbClr val="A5335F"/>
                 </a:solidFill>
                 <a:latin typeface="Verdana"/>
               </a:rPr>
@@ -5806,7 +5806,7 @@
             <a:r>
               <a:rPr sz="1300" b="1" i="0" spc="156">
                 <a:solidFill>
-                  <a:srgbClr val="166534"/>
+                  <a:srgbClr val="A5335F"/>
                 </a:solidFill>
                 <a:latin typeface="Verdana"/>
               </a:rPr>
@@ -6355,7 +6355,7 @@
             <a:r>
               <a:rPr sz="1300" b="1" i="0" spc="156">
                 <a:solidFill>
-                  <a:srgbClr val="166534"/>
+                  <a:srgbClr val="A5335F"/>
                 </a:solidFill>
                 <a:latin typeface="Verdana"/>
               </a:rPr>
@@ -6505,7 +6505,7 @@
             </a:avLst>
           </a:prstGeom>
           <a:solidFill>
-            <a:srgbClr val="E3F1E7"/>
+            <a:srgbClr val="FCE9F0"/>
           </a:solidFill>
           <a:ln>
             <a:noFill/>
@@ -6562,7 +6562,7 @@
             <a:r>
               <a:rPr sz="1500" b="1" i="0">
                 <a:solidFill>
-                  <a:srgbClr val="166534"/>
+                  <a:srgbClr val="A5335F"/>
                 </a:solidFill>
                 <a:latin typeface="Verdana"/>
               </a:rPr>
@@ -6673,7 +6673,7 @@
             </a:avLst>
           </a:prstGeom>
           <a:solidFill>
-            <a:srgbClr val="E3F1E7"/>
+            <a:srgbClr val="FCE9F0"/>
           </a:solidFill>
           <a:ln>
             <a:noFill/>
@@ -6730,7 +6730,7 @@
             <a:r>
               <a:rPr sz="1500" b="1" i="0">
                 <a:solidFill>
-                  <a:srgbClr val="166534"/>
+                  <a:srgbClr val="A5335F"/>
                 </a:solidFill>
                 <a:latin typeface="Verdana"/>
               </a:rPr>
@@ -6841,7 +6841,7 @@
             </a:avLst>
           </a:prstGeom>
           <a:solidFill>
-            <a:srgbClr val="E3F1E7"/>
+            <a:srgbClr val="FCE9F0"/>
           </a:solidFill>
           <a:ln>
             <a:noFill/>
@@ -6898,7 +6898,7 @@
             <a:r>
               <a:rPr sz="1500" b="1" i="0">
                 <a:solidFill>
-                  <a:srgbClr val="166534"/>
+                  <a:srgbClr val="A5335F"/>
                 </a:solidFill>
                 <a:latin typeface="Verdana"/>
               </a:rPr>
@@ -7009,7 +7009,7 @@
             </a:avLst>
           </a:prstGeom>
           <a:solidFill>
-            <a:srgbClr val="E3F1E7"/>
+            <a:srgbClr val="FCE9F0"/>
           </a:solidFill>
           <a:ln>
             <a:noFill/>
@@ -7066,7 +7066,7 @@
             <a:r>
               <a:rPr sz="1500" b="1" i="0">
                 <a:solidFill>
-                  <a:srgbClr val="166534"/>
+                  <a:srgbClr val="A5335F"/>
                 </a:solidFill>
                 <a:latin typeface="Verdana"/>
               </a:rPr>
@@ -7177,7 +7177,7 @@
             </a:avLst>
           </a:prstGeom>
           <a:solidFill>
-            <a:srgbClr val="E3F1E7"/>
+            <a:srgbClr val="FCE9F0"/>
           </a:solidFill>
           <a:ln>
             <a:noFill/>
@@ -7234,7 +7234,7 @@
             <a:r>
               <a:rPr sz="1500" b="1" i="0">
                 <a:solidFill>
-                  <a:srgbClr val="166534"/>
+                  <a:srgbClr val="A5335F"/>
                 </a:solidFill>
                 <a:latin typeface="Verdana"/>
               </a:rPr>
@@ -7345,7 +7345,7 @@
             </a:avLst>
           </a:prstGeom>
           <a:solidFill>
-            <a:srgbClr val="E3F1E7"/>
+            <a:srgbClr val="FCE9F0"/>
           </a:solidFill>
           <a:ln>
             <a:noFill/>
@@ -7402,7 +7402,7 @@
             <a:r>
               <a:rPr sz="1500" b="1" i="0">
                 <a:solidFill>
-                  <a:srgbClr val="166534"/>
+                  <a:srgbClr val="A5335F"/>
                 </a:solidFill>
                 <a:latin typeface="Verdana"/>
               </a:rPr>
@@ -7618,7 +7618,7 @@
             <a:r>
               <a:rPr sz="1300" b="1" i="0" spc="156">
                 <a:solidFill>
-                  <a:srgbClr val="166534"/>
+                  <a:srgbClr val="A5335F"/>
                 </a:solidFill>
                 <a:latin typeface="Verdana"/>
               </a:rPr>
@@ -7768,7 +7768,7 @@
             </a:avLst>
           </a:prstGeom>
           <a:solidFill>
-            <a:srgbClr val="E3F1E7"/>
+            <a:srgbClr val="FCE9F0"/>
           </a:solidFill>
           <a:ln>
             <a:noFill/>
@@ -7825,7 +7825,7 @@
             <a:r>
               <a:rPr sz="1500" b="1" i="0">
                 <a:solidFill>
-                  <a:srgbClr val="166534"/>
+                  <a:srgbClr val="A5335F"/>
                 </a:solidFill>
                 <a:latin typeface="Verdana"/>
               </a:rPr>
@@ -7945,7 +7945,7 @@
             </a:avLst>
           </a:prstGeom>
           <a:solidFill>
-            <a:srgbClr val="E3F1E7"/>
+            <a:srgbClr val="FCE9F0"/>
           </a:solidFill>
           <a:ln>
             <a:noFill/>
@@ -8002,7 +8002,7 @@
             <a:r>
               <a:rPr sz="1500" b="1" i="0">
                 <a:solidFill>
-                  <a:srgbClr val="166534"/>
+                  <a:srgbClr val="A5335F"/>
                 </a:solidFill>
                 <a:latin typeface="Verdana"/>
               </a:rPr>
@@ -8122,7 +8122,7 @@
             </a:avLst>
           </a:prstGeom>
           <a:solidFill>
-            <a:srgbClr val="E3F1E7"/>
+            <a:srgbClr val="FCE9F0"/>
           </a:solidFill>
           <a:ln>
             <a:noFill/>
@@ -8179,7 +8179,7 @@
             <a:r>
               <a:rPr sz="1500" b="1" i="0">
                 <a:solidFill>
-                  <a:srgbClr val="166534"/>
+                  <a:srgbClr val="A5335F"/>
                 </a:solidFill>
                 <a:latin typeface="Verdana"/>
               </a:rPr>
@@ -8299,7 +8299,7 @@
             </a:avLst>
           </a:prstGeom>
           <a:solidFill>
-            <a:srgbClr val="E3F1E7"/>
+            <a:srgbClr val="FCE9F0"/>
           </a:solidFill>
           <a:ln>
             <a:noFill/>
@@ -8356,7 +8356,7 @@
             <a:r>
               <a:rPr sz="1500" b="1" i="0">
                 <a:solidFill>
-                  <a:srgbClr val="166534"/>
+                  <a:srgbClr val="A5335F"/>
                 </a:solidFill>
                 <a:latin typeface="Verdana"/>
               </a:rPr>
@@ -8476,7 +8476,7 @@
             </a:avLst>
           </a:prstGeom>
           <a:solidFill>
-            <a:srgbClr val="E3F1E7"/>
+            <a:srgbClr val="FCE9F0"/>
           </a:solidFill>
           <a:ln>
             <a:noFill/>
@@ -8533,7 +8533,7 @@
             <a:r>
               <a:rPr sz="1500" b="1" i="0">
                 <a:solidFill>
-                  <a:srgbClr val="166534"/>
+                  <a:srgbClr val="A5335F"/>
                 </a:solidFill>
                 <a:latin typeface="Verdana"/>
               </a:rPr>
@@ -8653,7 +8653,7 @@
             </a:avLst>
           </a:prstGeom>
           <a:solidFill>
-            <a:srgbClr val="E3F1E7"/>
+            <a:srgbClr val="FCE9F0"/>
           </a:solidFill>
           <a:ln>
             <a:noFill/>
@@ -8710,7 +8710,7 @@
             <a:r>
               <a:rPr sz="1500" b="1" i="0">
                 <a:solidFill>
-                  <a:srgbClr val="166534"/>
+                  <a:srgbClr val="A5335F"/>
                 </a:solidFill>
                 <a:latin typeface="Verdana"/>
               </a:rPr>
@@ -9398,7 +9398,7 @@
             <a:r>
               <a:rPr sz="1300" b="1" i="0" spc="156">
                 <a:solidFill>
-                  <a:srgbClr val="166534"/>
+                  <a:srgbClr val="A5335F"/>
                 </a:solidFill>
                 <a:latin typeface="Verdana"/>
               </a:rPr>
@@ -9509,7 +9509,7 @@
             </a:avLst>
           </a:prstGeom>
           <a:solidFill>
-            <a:srgbClr val="E3F1E7"/>
+            <a:srgbClr val="FCE9F0"/>
           </a:solidFill>
           <a:ln>
             <a:noFill/>
@@ -9566,7 +9566,7 @@
             <a:r>
               <a:rPr sz="1500" b="1" i="0">
                 <a:solidFill>
-                  <a:srgbClr val="166534"/>
+                  <a:srgbClr val="A5335F"/>
                 </a:solidFill>
                 <a:latin typeface="Verdana"/>
               </a:rPr>
@@ -9677,7 +9677,7 @@
             </a:avLst>
           </a:prstGeom>
           <a:solidFill>
-            <a:srgbClr val="E3F1E7"/>
+            <a:srgbClr val="FCE9F0"/>
           </a:solidFill>
           <a:ln>
             <a:noFill/>
@@ -9734,7 +9734,7 @@
             <a:r>
               <a:rPr sz="1500" b="1" i="0">
                 <a:solidFill>
-                  <a:srgbClr val="166534"/>
+                  <a:srgbClr val="A5335F"/>
                 </a:solidFill>
                 <a:latin typeface="Verdana"/>
               </a:rPr>
@@ -9845,7 +9845,7 @@
             </a:avLst>
           </a:prstGeom>
           <a:solidFill>
-            <a:srgbClr val="E3F1E7"/>
+            <a:srgbClr val="FCE9F0"/>
           </a:solidFill>
           <a:ln>
             <a:noFill/>
@@ -9902,7 +9902,7 @@
             <a:r>
               <a:rPr sz="1500" b="1" i="0">
                 <a:solidFill>
-                  <a:srgbClr val="166534"/>
+                  <a:srgbClr val="A5335F"/>
                 </a:solidFill>
                 <a:latin typeface="Verdana"/>
               </a:rPr>
@@ -10013,7 +10013,7 @@
             </a:avLst>
           </a:prstGeom>
           <a:solidFill>
-            <a:srgbClr val="E3F1E7"/>
+            <a:srgbClr val="FCE9F0"/>
           </a:solidFill>
           <a:ln>
             <a:noFill/>
@@ -10070,7 +10070,7 @@
             <a:r>
               <a:rPr sz="1500" b="1" i="0">
                 <a:solidFill>
-                  <a:srgbClr val="166534"/>
+                  <a:srgbClr val="A5335F"/>
                 </a:solidFill>
                 <a:latin typeface="Verdana"/>
               </a:rPr>
@@ -10286,7 +10286,7 @@
             <a:r>
               <a:rPr sz="1300" b="1" i="0" spc="156">
                 <a:solidFill>
-                  <a:srgbClr val="166534"/>
+                  <a:srgbClr val="A5335F"/>
                 </a:solidFill>
                 <a:latin typeface="Verdana"/>
               </a:rPr>
@@ -10488,7 +10488,7 @@
             <a:r>
               <a:rPr sz="1600" b="1" i="0">
                 <a:solidFill>
-                  <a:srgbClr val="166534"/>
+                  <a:srgbClr val="A5335F"/>
                 </a:solidFill>
                 <a:latin typeface="Verdana"/>
               </a:rPr>
@@ -10608,7 +10608,7 @@
             <a:r>
               <a:rPr sz="1600" b="1" i="0">
                 <a:solidFill>
-                  <a:srgbClr val="166534"/>
+                  <a:srgbClr val="A5335F"/>
                 </a:solidFill>
                 <a:latin typeface="Verdana"/>
               </a:rPr>
@@ -10728,7 +10728,7 @@
             <a:r>
               <a:rPr sz="1600" b="1" i="0">
                 <a:solidFill>
-                  <a:srgbClr val="166534"/>
+                  <a:srgbClr val="A5335F"/>
                 </a:solidFill>
                 <a:latin typeface="Verdana"/>
               </a:rPr>
@@ -10848,7 +10848,7 @@
             <a:r>
               <a:rPr sz="1600" b="1" i="0">
                 <a:solidFill>
-                  <a:srgbClr val="166534"/>
+                  <a:srgbClr val="A5335F"/>
                 </a:solidFill>
                 <a:latin typeface="Verdana"/>
               </a:rPr>
@@ -10968,7 +10968,7 @@
             <a:r>
               <a:rPr sz="1600" b="1" i="0">
                 <a:solidFill>
-                  <a:srgbClr val="166534"/>
+                  <a:srgbClr val="A5335F"/>
                 </a:solidFill>
                 <a:latin typeface="Verdana"/>
               </a:rPr>
@@ -11269,7 +11269,7 @@
             <a:r>
               <a:rPr sz="1300" b="1" i="0" spc="156">
                 <a:solidFill>
-                  <a:srgbClr val="166534"/>
+                  <a:srgbClr val="A5335F"/>
                 </a:solidFill>
                 <a:latin typeface="Verdana"/>
               </a:rPr>
@@ -11393,7 +11393,7 @@
             <a:r>
               <a:rPr sz="2400" b="1" i="0">
                 <a:solidFill>
-                  <a:srgbClr val="166534"/>
+                  <a:srgbClr val="A5335F"/>
                 </a:solidFill>
                 <a:latin typeface="Verdana"/>
               </a:rPr>
@@ -11517,7 +11517,7 @@
             <a:r>
               <a:rPr sz="2400" b="1" i="0">
                 <a:solidFill>
-                  <a:srgbClr val="166534"/>
+                  <a:srgbClr val="A5335F"/>
                 </a:solidFill>
                 <a:latin typeface="Verdana"/>
               </a:rPr>
@@ -11641,7 +11641,7 @@
             <a:r>
               <a:rPr sz="2400" b="1" i="0">
                 <a:solidFill>
-                  <a:srgbClr val="166534"/>
+                  <a:srgbClr val="A5335F"/>
                 </a:solidFill>
                 <a:latin typeface="Verdana"/>
               </a:rPr>
@@ -11765,7 +11765,7 @@
             <a:r>
               <a:rPr sz="2400" b="1" i="0">
                 <a:solidFill>
-                  <a:srgbClr val="166534"/>
+                  <a:srgbClr val="A5335F"/>
                 </a:solidFill>
                 <a:latin typeface="Verdana"/>
               </a:rPr>
@@ -11981,7 +11981,7 @@
             <a:r>
               <a:rPr sz="1300" b="1" i="0" spc="156">
                 <a:solidFill>
-                  <a:srgbClr val="166534"/>
+                  <a:srgbClr val="A5335F"/>
                 </a:solidFill>
                 <a:latin typeface="Verdana"/>
               </a:rPr>
@@ -12183,7 +12183,7 @@
             <a:r>
               <a:rPr sz="1700" b="1" i="0">
                 <a:solidFill>
-                  <a:srgbClr val="166534"/>
+                  <a:srgbClr val="A5335F"/>
                 </a:solidFill>
                 <a:latin typeface="Verdana"/>
               </a:rPr>
@@ -12303,7 +12303,7 @@
             <a:r>
               <a:rPr sz="1700" b="1" i="0">
                 <a:solidFill>
-                  <a:srgbClr val="166534"/>
+                  <a:srgbClr val="A5335F"/>
                 </a:solidFill>
                 <a:latin typeface="Verdana"/>
               </a:rPr>
@@ -12423,7 +12423,7 @@
             <a:r>
               <a:rPr sz="1700" b="1" i="0">
                 <a:solidFill>
-                  <a:srgbClr val="166534"/>
+                  <a:srgbClr val="A5335F"/>
                 </a:solidFill>
                 <a:latin typeface="Verdana"/>
               </a:rPr>
@@ -12543,7 +12543,7 @@
             <a:r>
               <a:rPr sz="1700" b="1" i="0">
                 <a:solidFill>
-                  <a:srgbClr val="166534"/>
+                  <a:srgbClr val="A5335F"/>
                 </a:solidFill>
                 <a:latin typeface="Verdana"/>
               </a:rPr>
@@ -12663,7 +12663,7 @@
             <a:r>
               <a:rPr sz="1700" b="1" i="0">
                 <a:solidFill>
-                  <a:srgbClr val="166534"/>
+                  <a:srgbClr val="A5335F"/>
                 </a:solidFill>
                 <a:latin typeface="Verdana"/>
               </a:rPr>
@@ -12964,7 +12964,7 @@
             <a:r>
               <a:rPr sz="1300" b="1" i="0" spc="156">
                 <a:solidFill>
-                  <a:srgbClr val="166534"/>
+                  <a:srgbClr val="A5335F"/>
                 </a:solidFill>
                 <a:latin typeface="Verdana"/>
               </a:rPr>
@@ -12990,7 +12990,7 @@
             </a:avLst>
           </a:prstGeom>
           <a:solidFill>
-            <a:srgbClr val="E3F1E7"/>
+            <a:srgbClr val="FCE9F0"/>
           </a:solidFill>
           <a:ln w="12700">
             <a:solidFill>
@@ -13311,7 +13311,7 @@
             <a:r>
               <a:rPr sz="1300" b="1" i="0" spc="156">
                 <a:solidFill>
-                  <a:srgbClr val="166534"/>
+                  <a:srgbClr val="A5335F"/>
                 </a:solidFill>
                 <a:latin typeface="Verdana"/>
               </a:rPr>
@@ -13461,7 +13461,7 @@
             </a:avLst>
           </a:prstGeom>
           <a:solidFill>
-            <a:srgbClr val="E3F1E7"/>
+            <a:srgbClr val="FCE9F0"/>
           </a:solidFill>
           <a:ln>
             <a:noFill/>
@@ -13518,7 +13518,7 @@
             <a:r>
               <a:rPr sz="1500" b="1" i="0">
                 <a:solidFill>
-                  <a:srgbClr val="166534"/>
+                  <a:srgbClr val="A5335F"/>
                 </a:solidFill>
                 <a:latin typeface="Verdana"/>
               </a:rPr>
@@ -13629,7 +13629,7 @@
             </a:avLst>
           </a:prstGeom>
           <a:solidFill>
-            <a:srgbClr val="E3F1E7"/>
+            <a:srgbClr val="FCE9F0"/>
           </a:solidFill>
           <a:ln>
             <a:noFill/>
@@ -13686,7 +13686,7 @@
             <a:r>
               <a:rPr sz="1500" b="1" i="0">
                 <a:solidFill>
-                  <a:srgbClr val="166534"/>
+                  <a:srgbClr val="A5335F"/>
                 </a:solidFill>
                 <a:latin typeface="Verdana"/>
               </a:rPr>
@@ -13797,7 +13797,7 @@
             </a:avLst>
           </a:prstGeom>
           <a:solidFill>
-            <a:srgbClr val="E3F1E7"/>
+            <a:srgbClr val="FCE9F0"/>
           </a:solidFill>
           <a:ln>
             <a:noFill/>
@@ -13854,7 +13854,7 @@
             <a:r>
               <a:rPr sz="1500" b="1" i="0">
                 <a:solidFill>
-                  <a:srgbClr val="166534"/>
+                  <a:srgbClr val="A5335F"/>
                 </a:solidFill>
                 <a:latin typeface="Verdana"/>
               </a:rPr>
@@ -13965,7 +13965,7 @@
             </a:avLst>
           </a:prstGeom>
           <a:solidFill>
-            <a:srgbClr val="E3F1E7"/>
+            <a:srgbClr val="FCE9F0"/>
           </a:solidFill>
           <a:ln>
             <a:noFill/>
@@ -14022,7 +14022,7 @@
             <a:r>
               <a:rPr sz="1500" b="1" i="0">
                 <a:solidFill>
-                  <a:srgbClr val="166534"/>
+                  <a:srgbClr val="A5335F"/>
                 </a:solidFill>
                 <a:latin typeface="Verdana"/>
               </a:rPr>
@@ -14133,7 +14133,7 @@
             </a:avLst>
           </a:prstGeom>
           <a:solidFill>
-            <a:srgbClr val="E3F1E7"/>
+            <a:srgbClr val="FCE9F0"/>
           </a:solidFill>
           <a:ln>
             <a:noFill/>
@@ -14190,7 +14190,7 @@
             <a:r>
               <a:rPr sz="1500" b="1" i="0">
                 <a:solidFill>
-                  <a:srgbClr val="166534"/>
+                  <a:srgbClr val="A5335F"/>
                 </a:solidFill>
                 <a:latin typeface="Verdana"/>
               </a:rPr>
@@ -14406,7 +14406,7 @@
             <a:r>
               <a:rPr sz="1300" b="1" i="0" spc="156">
                 <a:solidFill>
-                  <a:srgbClr val="166534"/>
+                  <a:srgbClr val="A5335F"/>
                 </a:solidFill>
                 <a:latin typeface="Verdana"/>
               </a:rPr>
@@ -14556,7 +14556,7 @@
             </a:avLst>
           </a:prstGeom>
           <a:solidFill>
-            <a:srgbClr val="E3F1E7"/>
+            <a:srgbClr val="FCE9F0"/>
           </a:solidFill>
           <a:ln>
             <a:noFill/>
@@ -14613,7 +14613,7 @@
             <a:r>
               <a:rPr sz="1500" b="1" i="0">
                 <a:solidFill>
-                  <a:srgbClr val="166534"/>
+                  <a:srgbClr val="A5335F"/>
                 </a:solidFill>
                 <a:latin typeface="Verdana"/>
               </a:rPr>
@@ -14733,7 +14733,7 @@
             </a:avLst>
           </a:prstGeom>
           <a:solidFill>
-            <a:srgbClr val="E3F1E7"/>
+            <a:srgbClr val="FCE9F0"/>
           </a:solidFill>
           <a:ln>
             <a:noFill/>
@@ -14790,7 +14790,7 @@
             <a:r>
               <a:rPr sz="1500" b="1" i="0">
                 <a:solidFill>
-                  <a:srgbClr val="166534"/>
+                  <a:srgbClr val="A5335F"/>
                 </a:solidFill>
                 <a:latin typeface="Verdana"/>
               </a:rPr>
@@ -14910,7 +14910,7 @@
             </a:avLst>
           </a:prstGeom>
           <a:solidFill>
-            <a:srgbClr val="E3F1E7"/>
+            <a:srgbClr val="FCE9F0"/>
           </a:solidFill>
           <a:ln>
             <a:noFill/>
@@ -14967,7 +14967,7 @@
             <a:r>
               <a:rPr sz="1500" b="1" i="0">
                 <a:solidFill>
-                  <a:srgbClr val="166534"/>
+                  <a:srgbClr val="A5335F"/>
                 </a:solidFill>
                 <a:latin typeface="Verdana"/>
               </a:rPr>
@@ -15087,7 +15087,7 @@
             </a:avLst>
           </a:prstGeom>
           <a:solidFill>
-            <a:srgbClr val="E3F1E7"/>
+            <a:srgbClr val="FCE9F0"/>
           </a:solidFill>
           <a:ln>
             <a:noFill/>
@@ -15144,7 +15144,7 @@
             <a:r>
               <a:rPr sz="1500" b="1" i="0">
                 <a:solidFill>
-                  <a:srgbClr val="166534"/>
+                  <a:srgbClr val="A5335F"/>
                 </a:solidFill>
                 <a:latin typeface="Verdana"/>
               </a:rPr>
@@ -15264,7 +15264,7 @@
             </a:avLst>
           </a:prstGeom>
           <a:solidFill>
-            <a:srgbClr val="E3F1E7"/>
+            <a:srgbClr val="FCE9F0"/>
           </a:solidFill>
           <a:ln>
             <a:noFill/>
@@ -15321,7 +15321,7 @@
             <a:r>
               <a:rPr sz="1500" b="1" i="0">
                 <a:solidFill>
-                  <a:srgbClr val="166534"/>
+                  <a:srgbClr val="A5335F"/>
                 </a:solidFill>
                 <a:latin typeface="Verdana"/>
               </a:rPr>
@@ -15546,7 +15546,7 @@
             <a:r>
               <a:rPr sz="1300" b="1" i="0" spc="156">
                 <a:solidFill>
-                  <a:srgbClr val="166534"/>
+                  <a:srgbClr val="A5335F"/>
                 </a:solidFill>
                 <a:latin typeface="Verdana"/>
               </a:rPr>
@@ -15696,7 +15696,7 @@
             </a:avLst>
           </a:prstGeom>
           <a:solidFill>
-            <a:srgbClr val="E3F1E7"/>
+            <a:srgbClr val="FCE9F0"/>
           </a:solidFill>
           <a:ln>
             <a:noFill/>
@@ -15753,7 +15753,7 @@
             <a:r>
               <a:rPr sz="1500" b="1" i="0">
                 <a:solidFill>
-                  <a:srgbClr val="166534"/>
+                  <a:srgbClr val="A5335F"/>
                 </a:solidFill>
                 <a:latin typeface="Verdana"/>
               </a:rPr>
@@ -15864,7 +15864,7 @@
             </a:avLst>
           </a:prstGeom>
           <a:solidFill>
-            <a:srgbClr val="E3F1E7"/>
+            <a:srgbClr val="FCE9F0"/>
           </a:solidFill>
           <a:ln>
             <a:noFill/>
@@ -15921,7 +15921,7 @@
             <a:r>
               <a:rPr sz="1500" b="1" i="0">
                 <a:solidFill>
-                  <a:srgbClr val="166534"/>
+                  <a:srgbClr val="A5335F"/>
                 </a:solidFill>
                 <a:latin typeface="Verdana"/>
               </a:rPr>
@@ -16032,7 +16032,7 @@
             </a:avLst>
           </a:prstGeom>
           <a:solidFill>
-            <a:srgbClr val="E3F1E7"/>
+            <a:srgbClr val="FCE9F0"/>
           </a:solidFill>
           <a:ln>
             <a:noFill/>
@@ -16089,7 +16089,7 @@
             <a:r>
               <a:rPr sz="1500" b="1" i="0">
                 <a:solidFill>
-                  <a:srgbClr val="166534"/>
+                  <a:srgbClr val="A5335F"/>
                 </a:solidFill>
                 <a:latin typeface="Verdana"/>
               </a:rPr>
@@ -16200,7 +16200,7 @@
             </a:avLst>
           </a:prstGeom>
           <a:solidFill>
-            <a:srgbClr val="E3F1E7"/>
+            <a:srgbClr val="FCE9F0"/>
           </a:solidFill>
           <a:ln>
             <a:noFill/>
@@ -16257,7 +16257,7 @@
             <a:r>
               <a:rPr sz="1500" b="1" i="0">
                 <a:solidFill>
-                  <a:srgbClr val="166534"/>
+                  <a:srgbClr val="A5335F"/>
                 </a:solidFill>
                 <a:latin typeface="Verdana"/>
               </a:rPr>

--- a/assets/powerpoints/module-urgence/C4-les-examens-et-les-soins.pptx
+++ b/assets/powerpoints/module-urgence/C4-les-examens-et-les-soins.pptx
@@ -11273,7 +11273,7 @@
                 </a:solidFill>
                 <a:latin typeface="Verdana"/>
               </a:rPr>
-              <a:t>EN APPRENDRE PLUS</a:t>
+              <a:t>OUVRIR LA MINI-LEÇON</a:t>
             </a:r>
           </a:p>
         </p:txBody>
